--- a/slide/CA3060-1-Introduction.pptx
+++ b/slide/CA3060-1-Introduction.pptx
@@ -184,49 +184,223 @@
 </p:presentation>
 </file>
 
-<file path=ppt/revisionInfo.xml><?xml version="1.0" encoding="utf-8"?>
-<p1510:revInfo xmlns:a="http://schemas.openxmlformats.org/drawingml/2006/main" xmlns:r="http://schemas.openxmlformats.org/officeDocument/2006/relationships" xmlns:p1510="http://schemas.microsoft.com/office/powerpoint/2015/10/main">
-  <p1510:revLst>
-    <p1510:client id="{D6171D71-9674-4F7C-9F27-6E2D01C4AD95}" v="1" dt="2026-01-22T16:07:32.330"/>
-  </p1510:revLst>
-</p1510:revInfo>
-</file>
-
 <file path=ppt/changesInfos/changesInfo1.xml><?xml version="1.0" encoding="utf-8"?>
 <pc:chgInfo xmlns:a="http://schemas.openxmlformats.org/drawingml/2006/main" xmlns:r="http://schemas.openxmlformats.org/officeDocument/2006/relationships" xmlns:ac="http://schemas.microsoft.com/office/drawing/2013/main/command" xmlns:pc="http://schemas.microsoft.com/office/powerpoint/2013/main/command">
   <pc:docChgLst>
-    <pc:chgData name="Chaoyi Sun (SDS,124090550)" userId="7336b744-5857-42bc-9fde-1c1347a32774" providerId="ADAL" clId="{3A35FEB6-D186-4DFE-8550-C935A8639321}"/>
-    <pc:docChg chg="undo custSel modSld">
-      <pc:chgData name="Chaoyi Sun (SDS,124090550)" userId="7336b744-5857-42bc-9fde-1c1347a32774" providerId="ADAL" clId="{3A35FEB6-D186-4DFE-8550-C935A8639321}" dt="2026-01-22T16:12:56.114" v="8" actId="1076"/>
+    <pc:chgData name="Prof. Wang Fangxin (SSE)" userId="ce1f3ee1-525b-4f0b-8f12-bc5b2dd7d371" providerId="ADAL" clId="{072444D5-B6E1-794C-B782-80CEB355B39B}"/>
+    <pc:docChg chg="undo custSel addSld modSld">
+      <pc:chgData name="Prof. Wang Fangxin (SSE)" userId="ce1f3ee1-525b-4f0b-8f12-bc5b2dd7d371" providerId="ADAL" clId="{072444D5-B6E1-794C-B782-80CEB355B39B}" dt="2023-01-04T10:36:32.720" v="702" actId="20577"/>
       <pc:docMkLst>
         <pc:docMk/>
       </pc:docMkLst>
       <pc:sldChg chg="modSp mod">
-        <pc:chgData name="Chaoyi Sun (SDS,124090550)" userId="7336b744-5857-42bc-9fde-1c1347a32774" providerId="ADAL" clId="{3A35FEB6-D186-4DFE-8550-C935A8639321}" dt="2026-01-22T16:12:56.114" v="8" actId="1076"/>
+        <pc:chgData name="Prof. Wang Fangxin (SSE)" userId="ce1f3ee1-525b-4f0b-8f12-bc5b2dd7d371" providerId="ADAL" clId="{072444D5-B6E1-794C-B782-80CEB355B39B}" dt="2023-01-04T10:36:26.792" v="695" actId="20577"/>
         <pc:sldMkLst>
           <pc:docMk/>
-          <pc:sldMk cId="1196963658" sldId="820"/>
+          <pc:sldMk cId="0" sldId="296"/>
         </pc:sldMkLst>
         <pc:spChg chg="mod">
-          <ac:chgData name="Chaoyi Sun (SDS,124090550)" userId="7336b744-5857-42bc-9fde-1c1347a32774" providerId="ADAL" clId="{3A35FEB6-D186-4DFE-8550-C935A8639321}" dt="2026-01-22T16:12:56.114" v="8" actId="1076"/>
+          <ac:chgData name="Prof. Wang Fangxin (SSE)" userId="ce1f3ee1-525b-4f0b-8f12-bc5b2dd7d371" providerId="ADAL" clId="{072444D5-B6E1-794C-B782-80CEB355B39B}" dt="2023-01-04T10:36:06.733" v="685" actId="20577"/>
           <ac:spMkLst>
             <pc:docMk/>
-            <pc:sldMk cId="1196963658" sldId="820"/>
-            <ac:spMk id="11" creationId="{77FEBC26-F276-45B5-BE75-BB2F8059057B}"/>
+            <pc:sldMk cId="0" sldId="296"/>
+            <ac:spMk id="3" creationId="{00000000-0000-0000-0000-000000000000}"/>
+          </ac:spMkLst>
+        </pc:spChg>
+        <pc:spChg chg="mod">
+          <ac:chgData name="Prof. Wang Fangxin (SSE)" userId="ce1f3ee1-525b-4f0b-8f12-bc5b2dd7d371" providerId="ADAL" clId="{072444D5-B6E1-794C-B782-80CEB355B39B}" dt="2023-01-04T10:36:26.792" v="695" actId="20577"/>
+          <ac:spMkLst>
+            <pc:docMk/>
+            <pc:sldMk cId="0" sldId="296"/>
+            <ac:spMk id="6" creationId="{00000000-0000-0000-0000-000000000000}"/>
           </ac:spMkLst>
         </pc:spChg>
       </pc:sldChg>
       <pc:sldChg chg="modSp mod">
-        <pc:chgData name="Chaoyi Sun (SDS,124090550)" userId="7336b744-5857-42bc-9fde-1c1347a32774" providerId="ADAL" clId="{3A35FEB6-D186-4DFE-8550-C935A8639321}" dt="2026-01-22T16:07:34.952" v="6" actId="20577"/>
+        <pc:chgData name="Prof. Wang Fangxin (SSE)" userId="ce1f3ee1-525b-4f0b-8f12-bc5b2dd7d371" providerId="ADAL" clId="{072444D5-B6E1-794C-B782-80CEB355B39B}" dt="2023-01-04T10:27:49.456" v="356" actId="20577"/>
         <pc:sldMkLst>
           <pc:docMk/>
-          <pc:sldMk cId="805662460" sldId="1359"/>
+          <pc:sldMk cId="0" sldId="299"/>
         </pc:sldMkLst>
         <pc:spChg chg="mod">
-          <ac:chgData name="Chaoyi Sun (SDS,124090550)" userId="7336b744-5857-42bc-9fde-1c1347a32774" providerId="ADAL" clId="{3A35FEB6-D186-4DFE-8550-C935A8639321}" dt="2026-01-22T16:07:34.952" v="6" actId="20577"/>
+          <ac:chgData name="Prof. Wang Fangxin (SSE)" userId="ce1f3ee1-525b-4f0b-8f12-bc5b2dd7d371" providerId="ADAL" clId="{072444D5-B6E1-794C-B782-80CEB355B39B}" dt="2023-01-04T10:27:49.456" v="356" actId="20577"/>
           <ac:spMkLst>
             <pc:docMk/>
-            <pc:sldMk cId="805662460" sldId="1359"/>
+            <pc:sldMk cId="0" sldId="299"/>
+            <ac:spMk id="3" creationId="{00000000-0000-0000-0000-000000000000}"/>
+          </ac:spMkLst>
+        </pc:spChg>
+      </pc:sldChg>
+      <pc:sldChg chg="modSp mod">
+        <pc:chgData name="Prof. Wang Fangxin (SSE)" userId="ce1f3ee1-525b-4f0b-8f12-bc5b2dd7d371" providerId="ADAL" clId="{072444D5-B6E1-794C-B782-80CEB355B39B}" dt="2023-01-04T10:24:58.830" v="335" actId="20577"/>
+        <pc:sldMkLst>
+          <pc:docMk/>
+          <pc:sldMk cId="0" sldId="391"/>
+        </pc:sldMkLst>
+        <pc:spChg chg="mod">
+          <ac:chgData name="Prof. Wang Fangxin (SSE)" userId="ce1f3ee1-525b-4f0b-8f12-bc5b2dd7d371" providerId="ADAL" clId="{072444D5-B6E1-794C-B782-80CEB355B39B}" dt="2023-01-04T10:24:58.830" v="335" actId="20577"/>
+          <ac:spMkLst>
+            <pc:docMk/>
+            <pc:sldMk cId="0" sldId="391"/>
+            <ac:spMk id="6" creationId="{00000000-0000-0000-0000-000000000000}"/>
+          </ac:spMkLst>
+        </pc:spChg>
+      </pc:sldChg>
+      <pc:sldChg chg="modSp add mod">
+        <pc:chgData name="Prof. Wang Fangxin (SSE)" userId="ce1f3ee1-525b-4f0b-8f12-bc5b2dd7d371" providerId="ADAL" clId="{072444D5-B6E1-794C-B782-80CEB355B39B}" dt="2023-01-04T10:36:32.720" v="702" actId="20577"/>
+        <pc:sldMkLst>
+          <pc:docMk/>
+          <pc:sldMk cId="2341894575" sldId="447"/>
+        </pc:sldMkLst>
+        <pc:spChg chg="mod">
+          <ac:chgData name="Prof. Wang Fangxin (SSE)" userId="ce1f3ee1-525b-4f0b-8f12-bc5b2dd7d371" providerId="ADAL" clId="{072444D5-B6E1-794C-B782-80CEB355B39B}" dt="2023-01-04T10:32:31.287" v="384" actId="20577"/>
+          <ac:spMkLst>
+            <pc:docMk/>
+            <pc:sldMk cId="2341894575" sldId="447"/>
+            <ac:spMk id="3" creationId="{00000000-0000-0000-0000-000000000000}"/>
+          </ac:spMkLst>
+        </pc:spChg>
+        <pc:spChg chg="mod">
+          <ac:chgData name="Prof. Wang Fangxin (SSE)" userId="ce1f3ee1-525b-4f0b-8f12-bc5b2dd7d371" providerId="ADAL" clId="{072444D5-B6E1-794C-B782-80CEB355B39B}" dt="2023-01-04T10:36:32.720" v="702" actId="20577"/>
+          <ac:spMkLst>
+            <pc:docMk/>
+            <pc:sldMk cId="2341894575" sldId="447"/>
+            <ac:spMk id="6" creationId="{00000000-0000-0000-0000-000000000000}"/>
+          </ac:spMkLst>
+        </pc:spChg>
+      </pc:sldChg>
+    </pc:docChg>
+  </pc:docChgLst>
+  <pc:docChgLst>
+    <pc:chgData name="Prof. Wang Fangxin (SSE)" userId="ce1f3ee1-525b-4f0b-8f12-bc5b2dd7d371" providerId="ADAL" clId="{56731C7C-97E0-41C3-86F4-ADF8CE8A2053}"/>
+    <pc:docChg chg="undo custSel delSld modSld sldOrd">
+      <pc:chgData name="Prof. Wang Fangxin (SSE)" userId="ce1f3ee1-525b-4f0b-8f12-bc5b2dd7d371" providerId="ADAL" clId="{56731C7C-97E0-41C3-86F4-ADF8CE8A2053}" dt="2022-01-10T06:59:30.151" v="590" actId="2696"/>
+      <pc:docMkLst>
+        <pc:docMk/>
+      </pc:docMkLst>
+      <pc:sldChg chg="modSp">
+        <pc:chgData name="Prof. Wang Fangxin (SSE)" userId="ce1f3ee1-525b-4f0b-8f12-bc5b2dd7d371" providerId="ADAL" clId="{56731C7C-97E0-41C3-86F4-ADF8CE8A2053}" dt="2022-01-10T06:28:47.372" v="1" actId="27636"/>
+        <pc:sldMkLst>
+          <pc:docMk/>
+          <pc:sldMk cId="0" sldId="262"/>
+        </pc:sldMkLst>
+        <pc:spChg chg="mod">
+          <ac:chgData name="Prof. Wang Fangxin (SSE)" userId="ce1f3ee1-525b-4f0b-8f12-bc5b2dd7d371" providerId="ADAL" clId="{56731C7C-97E0-41C3-86F4-ADF8CE8A2053}" dt="2022-01-10T06:28:47.372" v="1" actId="27636"/>
+          <ac:spMkLst>
+            <pc:docMk/>
+            <pc:sldMk cId="0" sldId="262"/>
+            <ac:spMk id="3" creationId="{00000000-0000-0000-0000-000000000000}"/>
+          </ac:spMkLst>
+        </pc:spChg>
+      </pc:sldChg>
+      <pc:sldChg chg="del">
+        <pc:chgData name="Prof. Wang Fangxin (SSE)" userId="ce1f3ee1-525b-4f0b-8f12-bc5b2dd7d371" providerId="ADAL" clId="{56731C7C-97E0-41C3-86F4-ADF8CE8A2053}" dt="2022-01-10T06:59:30.151" v="590" actId="2696"/>
+        <pc:sldMkLst>
+          <pc:docMk/>
+          <pc:sldMk cId="0" sldId="272"/>
+        </pc:sldMkLst>
+      </pc:sldChg>
+      <pc:sldChg chg="addSp modSp">
+        <pc:chgData name="Prof. Wang Fangxin (SSE)" userId="ce1f3ee1-525b-4f0b-8f12-bc5b2dd7d371" providerId="ADAL" clId="{56731C7C-97E0-41C3-86F4-ADF8CE8A2053}" dt="2022-01-10T06:30:29.070" v="33" actId="1076"/>
+        <pc:sldMkLst>
+          <pc:docMk/>
+          <pc:sldMk cId="0" sldId="295"/>
+        </pc:sldMkLst>
+        <pc:spChg chg="add mod">
+          <ac:chgData name="Prof. Wang Fangxin (SSE)" userId="ce1f3ee1-525b-4f0b-8f12-bc5b2dd7d371" providerId="ADAL" clId="{56731C7C-97E0-41C3-86F4-ADF8CE8A2053}" dt="2022-01-10T06:30:29.070" v="33" actId="1076"/>
+          <ac:spMkLst>
+            <pc:docMk/>
+            <pc:sldMk cId="0" sldId="295"/>
+            <ac:spMk id="4" creationId="{5E4FC43E-652B-47EE-A940-42294AB0E172}"/>
+          </ac:spMkLst>
+        </pc:spChg>
+      </pc:sldChg>
+      <pc:sldChg chg="modSp">
+        <pc:chgData name="Prof. Wang Fangxin (SSE)" userId="ce1f3ee1-525b-4f0b-8f12-bc5b2dd7d371" providerId="ADAL" clId="{56731C7C-97E0-41C3-86F4-ADF8CE8A2053}" dt="2022-01-10T06:51:11.053" v="586" actId="404"/>
+        <pc:sldMkLst>
+          <pc:docMk/>
+          <pc:sldMk cId="0" sldId="296"/>
+        </pc:sldMkLst>
+        <pc:spChg chg="mod">
+          <ac:chgData name="Prof. Wang Fangxin (SSE)" userId="ce1f3ee1-525b-4f0b-8f12-bc5b2dd7d371" providerId="ADAL" clId="{56731C7C-97E0-41C3-86F4-ADF8CE8A2053}" dt="2022-01-10T06:51:11.053" v="586" actId="404"/>
+          <ac:spMkLst>
+            <pc:docMk/>
+            <pc:sldMk cId="0" sldId="296"/>
+            <ac:spMk id="3" creationId="{00000000-0000-0000-0000-000000000000}"/>
+          </ac:spMkLst>
+        </pc:spChg>
+      </pc:sldChg>
+      <pc:sldChg chg="modSp">
+        <pc:chgData name="Prof. Wang Fangxin (SSE)" userId="ce1f3ee1-525b-4f0b-8f12-bc5b2dd7d371" providerId="ADAL" clId="{56731C7C-97E0-41C3-86F4-ADF8CE8A2053}" dt="2022-01-10T06:44:19.141" v="478" actId="207"/>
+        <pc:sldMkLst>
+          <pc:docMk/>
+          <pc:sldMk cId="0" sldId="299"/>
+        </pc:sldMkLst>
+        <pc:spChg chg="mod">
+          <ac:chgData name="Prof. Wang Fangxin (SSE)" userId="ce1f3ee1-525b-4f0b-8f12-bc5b2dd7d371" providerId="ADAL" clId="{56731C7C-97E0-41C3-86F4-ADF8CE8A2053}" dt="2022-01-10T06:44:19.141" v="478" actId="207"/>
+          <ac:spMkLst>
+            <pc:docMk/>
+            <pc:sldMk cId="0" sldId="299"/>
+            <ac:spMk id="3" creationId="{00000000-0000-0000-0000-000000000000}"/>
+          </ac:spMkLst>
+        </pc:spChg>
+      </pc:sldChg>
+      <pc:sldChg chg="modSp ord">
+        <pc:chgData name="Prof. Wang Fangxin (SSE)" userId="ce1f3ee1-525b-4f0b-8f12-bc5b2dd7d371" providerId="ADAL" clId="{56731C7C-97E0-41C3-86F4-ADF8CE8A2053}" dt="2022-01-10T06:48:53.068" v="570" actId="207"/>
+        <pc:sldMkLst>
+          <pc:docMk/>
+          <pc:sldMk cId="0" sldId="301"/>
+        </pc:sldMkLst>
+        <pc:spChg chg="mod">
+          <ac:chgData name="Prof. Wang Fangxin (SSE)" userId="ce1f3ee1-525b-4f0b-8f12-bc5b2dd7d371" providerId="ADAL" clId="{56731C7C-97E0-41C3-86F4-ADF8CE8A2053}" dt="2022-01-10T06:48:53.068" v="570" actId="207"/>
+          <ac:spMkLst>
+            <pc:docMk/>
+            <pc:sldMk cId="0" sldId="301"/>
+            <ac:spMk id="3" creationId="{00000000-0000-0000-0000-000000000000}"/>
+          </ac:spMkLst>
+        </pc:spChg>
+      </pc:sldChg>
+      <pc:sldChg chg="modSp">
+        <pc:chgData name="Prof. Wang Fangxin (SSE)" userId="ce1f3ee1-525b-4f0b-8f12-bc5b2dd7d371" providerId="ADAL" clId="{56731C7C-97E0-41C3-86F4-ADF8CE8A2053}" dt="2022-01-10T06:51:17.850" v="588" actId="404"/>
+        <pc:sldMkLst>
+          <pc:docMk/>
+          <pc:sldMk cId="0" sldId="391"/>
+        </pc:sldMkLst>
+        <pc:spChg chg="mod">
+          <ac:chgData name="Prof. Wang Fangxin (SSE)" userId="ce1f3ee1-525b-4f0b-8f12-bc5b2dd7d371" providerId="ADAL" clId="{56731C7C-97E0-41C3-86F4-ADF8CE8A2053}" dt="2022-01-10T06:51:17.850" v="588" actId="404"/>
+          <ac:spMkLst>
+            <pc:docMk/>
+            <pc:sldMk cId="0" sldId="391"/>
+            <ac:spMk id="6" creationId="{00000000-0000-0000-0000-000000000000}"/>
+          </ac:spMkLst>
+        </pc:spChg>
+      </pc:sldChg>
+      <pc:sldChg chg="modSp del">
+        <pc:chgData name="Prof. Wang Fangxin (SSE)" userId="ce1f3ee1-525b-4f0b-8f12-bc5b2dd7d371" providerId="ADAL" clId="{56731C7C-97E0-41C3-86F4-ADF8CE8A2053}" dt="2022-01-10T06:51:27.305" v="589" actId="2696"/>
+        <pc:sldMkLst>
+          <pc:docMk/>
+          <pc:sldMk cId="0" sldId="392"/>
+        </pc:sldMkLst>
+        <pc:spChg chg="mod">
+          <ac:chgData name="Prof. Wang Fangxin (SSE)" userId="ce1f3ee1-525b-4f0b-8f12-bc5b2dd7d371" providerId="ADAL" clId="{56731C7C-97E0-41C3-86F4-ADF8CE8A2053}" dt="2022-01-10T06:41:58.169" v="400" actId="20577"/>
+          <ac:spMkLst>
+            <pc:docMk/>
+            <pc:sldMk cId="0" sldId="392"/>
+            <ac:spMk id="6" creationId="{00000000-0000-0000-0000-000000000000}"/>
+          </ac:spMkLst>
+        </pc:spChg>
+      </pc:sldChg>
+      <pc:sldChg chg="modSp">
+        <pc:chgData name="Prof. Wang Fangxin (SSE)" userId="ce1f3ee1-525b-4f0b-8f12-bc5b2dd7d371" providerId="ADAL" clId="{56731C7C-97E0-41C3-86F4-ADF8CE8A2053}" dt="2022-01-10T06:45:25" v="501" actId="20577"/>
+        <pc:sldMkLst>
+          <pc:docMk/>
+          <pc:sldMk cId="2446583169" sldId="445"/>
+        </pc:sldMkLst>
+        <pc:spChg chg="mod">
+          <ac:chgData name="Prof. Wang Fangxin (SSE)" userId="ce1f3ee1-525b-4f0b-8f12-bc5b2dd7d371" providerId="ADAL" clId="{56731C7C-97E0-41C3-86F4-ADF8CE8A2053}" dt="2022-01-10T06:45:25" v="501" actId="20577"/>
+          <ac:spMkLst>
+            <pc:docMk/>
+            <pc:sldMk cId="2446583169" sldId="445"/>
             <ac:spMk id="3" creationId="{00000000-0000-0000-0000-000000000000}"/>
           </ac:spMkLst>
         </pc:spChg>
@@ -318,7 +492,7 @@
           <a:p>
             <a:fld id="{45BDCE37-E9BE-4280-8D68-34E43D66CEDB}" type="datetimeFigureOut">
               <a:rPr lang="zh-TW" altLang="en-US" smtClean="0"/>
-              <a:t>2026/1/23</a:t>
+              <a:t>2026/1/13</a:t>
             </a:fld>
             <a:endParaRPr lang="zh-TW" altLang="en-US"/>
           </a:p>
@@ -483,7 +657,7 @@
           <a:p>
             <a:fld id="{FBFBA883-381C-409E-9635-BB54B21745E4}" type="datetimeFigureOut">
               <a:rPr lang="zh-TW" altLang="en-US" smtClean="0"/>
-              <a:t>2026/1/23</a:t>
+              <a:t>2026/1/13</a:t>
             </a:fld>
             <a:endParaRPr lang="zh-TW" altLang="en-US"/>
           </a:p>
@@ -40293,7 +40467,7 @@
                 <a:latin typeface="Times New Roman" panose="02020603050405020304" pitchFamily="18" charset="0"/>
                 <a:cs typeface="Times New Roman" panose="02020603050405020304" pitchFamily="18" charset="0"/>
               </a:rPr>
-              <a:t>hello.o</a:t>
+              <a:t>hello.s</a:t>
             </a:r>
             <a:endParaRPr lang="en-US" sz="2100" dirty="0">
               <a:latin typeface="Times New Roman" panose="02020603050405020304" pitchFamily="18" charset="0"/>
